--- a/ゲーム科2年/00_前期/ゲーム開発Ⅰ/ゲーム物理学/座学/23_力学的エネルギー保存の法則.pptx
+++ b/ゲーム科2年/00_前期/ゲーム開発Ⅰ/ゲーム物理学/座学/23_力学的エネルギー保存の法則.pptx
@@ -10,6 +10,8 @@
     <p:sldId id="263" r:id="rId4"/>
     <p:sldId id="264" r:id="rId5"/>
     <p:sldId id="265" r:id="rId6"/>
+    <p:sldId id="266" r:id="rId7"/>
+    <p:sldId id="267" r:id="rId8"/>
   </p:sldIdLst>
   <p:sldSz cx="12192000" cy="6858000"/>
   <p:notesSz cx="6858000" cy="9144000"/>
@@ -3708,8 +3710,8 @@
           </a:p>
         </p:txBody>
       </p:sp>
-      <mc:AlternateContent xmlns:mc="http://schemas.openxmlformats.org/markup-compatibility/2006">
-        <mc:Choice xmlns:a14="http://schemas.microsoft.com/office/drawing/2010/main" Requires="a14">
+      <mc:AlternateContent xmlns:mc="http://schemas.openxmlformats.org/markup-compatibility/2006" xmlns:a14="http://schemas.microsoft.com/office/drawing/2010/main">
+        <mc:Choice Requires="a14">
           <p:sp>
             <p:nvSpPr>
               <p:cNvPr id="6" name="テキスト ボックス 5">
@@ -4211,7 +4213,7 @@
             </p:txBody>
           </p:sp>
         </mc:Choice>
-        <mc:Fallback>
+        <mc:Fallback xmlns="">
           <p:sp>
             <p:nvSpPr>
               <p:cNvPr id="6" name="テキスト ボックス 5">
@@ -4322,8 +4324,8 @@
           </a:p>
         </p:txBody>
       </p:sp>
-      <mc:AlternateContent xmlns:mc="http://schemas.openxmlformats.org/markup-compatibility/2006">
-        <mc:Choice xmlns:a14="http://schemas.microsoft.com/office/drawing/2010/main" Requires="a14">
+      <mc:AlternateContent xmlns:mc="http://schemas.openxmlformats.org/markup-compatibility/2006" xmlns:a14="http://schemas.microsoft.com/office/drawing/2010/main">
+        <mc:Choice Requires="a14">
           <p:sp>
             <p:nvSpPr>
               <p:cNvPr id="6" name="テキスト ボックス 5">
@@ -4403,7 +4405,7 @@
             </p:txBody>
           </p:sp>
         </mc:Choice>
-        <mc:Fallback>
+        <mc:Fallback xmlns="">
           <p:sp>
             <p:nvSpPr>
               <p:cNvPr id="6" name="テキスト ボックス 5">
@@ -4631,8 +4633,8 @@
           </a:p>
         </p:txBody>
       </p:sp>
-      <mc:AlternateContent xmlns:mc="http://schemas.openxmlformats.org/markup-compatibility/2006">
-        <mc:Choice xmlns:a14="http://schemas.microsoft.com/office/drawing/2010/main" Requires="a14">
+      <mc:AlternateContent xmlns:mc="http://schemas.openxmlformats.org/markup-compatibility/2006" xmlns:a14="http://schemas.microsoft.com/office/drawing/2010/main">
+        <mc:Choice Requires="a14">
           <p:sp>
             <p:nvSpPr>
               <p:cNvPr id="19" name="テキスト ボックス 18">
@@ -4661,7 +4663,6 @@
               </a:bodyPr>
               <a:lstStyle/>
               <a:p>
-                <a:pPr/>
                 <a:r>
                   <a:rPr lang="en-US" altLang="ja-JP" b="1" dirty="0">
                     <a:solidFill>
@@ -4770,7 +4771,7 @@
             </p:txBody>
           </p:sp>
         </mc:Choice>
-        <mc:Fallback>
+        <mc:Fallback xmlns="">
           <p:sp>
             <p:nvSpPr>
               <p:cNvPr id="19" name="テキスト ボックス 18">
@@ -4881,8 +4882,8 @@
           </a:p>
         </p:txBody>
       </p:sp>
-      <mc:AlternateContent xmlns:mc="http://schemas.openxmlformats.org/markup-compatibility/2006">
-        <mc:Choice xmlns:a14="http://schemas.microsoft.com/office/drawing/2010/main" Requires="a14">
+      <mc:AlternateContent xmlns:mc="http://schemas.openxmlformats.org/markup-compatibility/2006" xmlns:a14="http://schemas.microsoft.com/office/drawing/2010/main">
+        <mc:Choice Requires="a14">
           <p:sp>
             <p:nvSpPr>
               <p:cNvPr id="6" name="テキスト ボックス 5">
@@ -4992,7 +4993,7 @@
             </p:txBody>
           </p:sp>
         </mc:Choice>
-        <mc:Fallback>
+        <mc:Fallback xmlns="">
           <p:sp>
             <p:nvSpPr>
               <p:cNvPr id="6" name="テキスト ボックス 5">
@@ -5138,8 +5139,8 @@
           </a:fontRef>
         </p:style>
       </p:cxnSp>
-      <mc:AlternateContent xmlns:mc="http://schemas.openxmlformats.org/markup-compatibility/2006">
-        <mc:Choice xmlns:a14="http://schemas.microsoft.com/office/drawing/2010/main" Requires="a14">
+      <mc:AlternateContent xmlns:mc="http://schemas.openxmlformats.org/markup-compatibility/2006" xmlns:a14="http://schemas.microsoft.com/office/drawing/2010/main">
+        <mc:Choice Requires="a14">
           <p:sp>
             <p:nvSpPr>
               <p:cNvPr id="19" name="テキスト ボックス 18">
@@ -5241,7 +5242,7 @@
             </p:txBody>
           </p:sp>
         </mc:Choice>
-        <mc:Fallback>
+        <mc:Fallback xmlns="">
           <p:sp>
             <p:nvSpPr>
               <p:cNvPr id="19" name="テキスト ボックス 18">
@@ -5660,8 +5661,8 @@
           </a:fontRef>
         </p:style>
       </p:cxnSp>
-      <mc:AlternateContent xmlns:mc="http://schemas.openxmlformats.org/markup-compatibility/2006">
-        <mc:Choice xmlns:a14="http://schemas.microsoft.com/office/drawing/2010/main" Requires="a14">
+      <mc:AlternateContent xmlns:mc="http://schemas.openxmlformats.org/markup-compatibility/2006" xmlns:a14="http://schemas.microsoft.com/office/drawing/2010/main">
+        <mc:Choice Requires="a14">
           <p:sp>
             <p:nvSpPr>
               <p:cNvPr id="19" name="テキスト ボックス 18">
@@ -5690,7 +5691,6 @@
               </a:bodyPr>
               <a:lstStyle/>
               <a:p>
-                <a:pPr/>
                 <a:r>
                   <a:rPr lang="en-US" altLang="ja-JP" b="1" dirty="0">
                     <a:solidFill>
@@ -5799,7 +5799,7 @@
             </p:txBody>
           </p:sp>
         </mc:Choice>
-        <mc:Fallback>
+        <mc:Fallback xmlns="">
           <p:sp>
             <p:nvSpPr>
               <p:cNvPr id="19" name="テキスト ボックス 18">
@@ -6074,8 +6074,8 @@
           </a:p>
         </p:txBody>
       </p:sp>
-      <mc:AlternateContent xmlns:mc="http://schemas.openxmlformats.org/markup-compatibility/2006">
-        <mc:Choice xmlns:a14="http://schemas.microsoft.com/office/drawing/2010/main" Requires="a14">
+      <mc:AlternateContent xmlns:mc="http://schemas.openxmlformats.org/markup-compatibility/2006" xmlns:a14="http://schemas.microsoft.com/office/drawing/2010/main">
+        <mc:Choice Requires="a14">
           <p:sp>
             <p:nvSpPr>
               <p:cNvPr id="6" name="テキスト ボックス 5">
@@ -6644,13 +6644,7 @@
                       <a:rPr lang="en-US" altLang="ja-JP" sz="2400" i="1" dirty="0">
                         <a:latin typeface="Cambria Math" panose="02040503050406030204" pitchFamily="18" charset="0"/>
                       </a:rPr>
-                      <m:t>+</m:t>
-                    </m:r>
-                    <m:r>
-                      <a:rPr lang="en-US" altLang="ja-JP" sz="2400" i="1" dirty="0">
-                        <a:latin typeface="Cambria Math" panose="02040503050406030204" pitchFamily="18" charset="0"/>
-                      </a:rPr>
-                      <m:t>(1</m:t>
+                      <m:t>+(1</m:t>
                     </m:r>
                     <m:r>
                       <a:rPr lang="en-US" altLang="ja-JP" sz="2400" i="1" dirty="0">
@@ -6705,13 +6699,7 @@
                       <a:rPr lang="en-US" altLang="ja-JP" sz="2400" i="1" dirty="0">
                         <a:latin typeface="Cambria Math" panose="02040503050406030204" pitchFamily="18" charset="0"/>
                       </a:rPr>
-                      <m:t>)</m:t>
-                    </m:r>
-                    <m:r>
-                      <a:rPr lang="en-US" altLang="ja-JP" sz="2400" i="1" dirty="0">
-                        <a:latin typeface="Cambria Math" panose="02040503050406030204" pitchFamily="18" charset="0"/>
-                      </a:rPr>
-                      <m:t>(</m:t>
+                      <m:t>)(</m:t>
                     </m:r>
                     <m:r>
                       <a:rPr lang="en-US" altLang="ja-JP" sz="2400" b="0" i="1" dirty="0" smtClean="0">
@@ -6913,13 +6901,7 @@
                       <a:rPr lang="en-US" altLang="ja-JP" sz="2400" b="0" i="1" dirty="0" smtClean="0">
                         <a:latin typeface="Cambria Math" panose="02040503050406030204" pitchFamily="18" charset="0"/>
                       </a:rPr>
-                      <m:t>=</m:t>
-                    </m:r>
-                    <m:r>
-                      <a:rPr lang="en-US" altLang="ja-JP" sz="2400" i="1" dirty="0">
-                        <a:latin typeface="Cambria Math" panose="02040503050406030204" pitchFamily="18" charset="0"/>
-                      </a:rPr>
-                      <m:t>49</m:t>
+                      <m:t>=49</m:t>
                     </m:r>
                     <m:r>
                       <a:rPr lang="en-US" altLang="ja-JP" sz="2400" i="1" dirty="0">
@@ -7304,7 +7286,7 @@
             </p:txBody>
           </p:sp>
         </mc:Choice>
-        <mc:Fallback>
+        <mc:Fallback xmlns="">
           <p:sp>
             <p:nvSpPr>
               <p:cNvPr id="6" name="テキスト ボックス 5">
@@ -7353,6 +7335,908 @@
     <p:extLst>
       <p:ext uri="{BB962C8B-B14F-4D97-AF65-F5344CB8AC3E}">
         <p14:creationId xmlns:p14="http://schemas.microsoft.com/office/powerpoint/2010/main" val="3523765654"/>
+      </p:ext>
+    </p:extLst>
+  </p:cSld>
+  <p:clrMapOvr>
+    <a:masterClrMapping/>
+  </p:clrMapOvr>
+</p:sld>
+</file>
+
+<file path=ppt/slides/slide6.xml><?xml version="1.0" encoding="utf-8"?>
+<p:sld xmlns:a="http://schemas.openxmlformats.org/drawingml/2006/main" xmlns:r="http://schemas.openxmlformats.org/officeDocument/2006/relationships" xmlns:p="http://schemas.openxmlformats.org/presentationml/2006/main">
+  <p:cSld>
+    <p:spTree>
+      <p:nvGrpSpPr>
+        <p:cNvPr id="1" name=""/>
+        <p:cNvGrpSpPr/>
+        <p:nvPr/>
+      </p:nvGrpSpPr>
+      <p:grpSpPr>
+        <a:xfrm>
+          <a:off x="0" y="0"/>
+          <a:ext cx="0" cy="0"/>
+          <a:chOff x="0" y="0"/>
+          <a:chExt cx="0" cy="0"/>
+        </a:xfrm>
+      </p:grpSpPr>
+      <p:sp>
+        <p:nvSpPr>
+          <p:cNvPr id="4" name="テキスト ボックス 3">
+            <a:extLst>
+              <a:ext uri="{FF2B5EF4-FFF2-40B4-BE49-F238E27FC236}">
+                <a16:creationId xmlns:a16="http://schemas.microsoft.com/office/drawing/2014/main" id="{5A13BF46-B8C5-48AA-8308-C9ECFF431A18}"/>
+              </a:ext>
+            </a:extLst>
+          </p:cNvPr>
+          <p:cNvSpPr txBox="1"/>
+          <p:nvPr/>
+        </p:nvSpPr>
+        <p:spPr>
+          <a:xfrm>
+            <a:off x="567542" y="491954"/>
+            <a:ext cx="6457217" cy="584775"/>
+          </a:xfrm>
+          <a:prstGeom prst="rect">
+            <a:avLst/>
+          </a:prstGeom>
+          <a:noFill/>
+        </p:spPr>
+        <p:txBody>
+          <a:bodyPr wrap="none" rtlCol="0">
+            <a:spAutoFit/>
+          </a:bodyPr>
+          <a:lstStyle/>
+          <a:p>
+            <a:r>
+              <a:rPr kumimoji="1" lang="ja-JP" altLang="en-US" sz="3200" b="1" u="sng" dirty="0"/>
+              <a:t>力学的エネルギー保存の法則 練習</a:t>
+            </a:r>
+            <a:endParaRPr kumimoji="1" lang="en-US" altLang="ja-JP" sz="3200" b="1" u="sng" dirty="0"/>
+          </a:p>
+        </p:txBody>
+      </p:sp>
+      <p:sp>
+        <p:nvSpPr>
+          <p:cNvPr id="6" name="テキスト ボックス 5">
+            <a:extLst>
+              <a:ext uri="{FF2B5EF4-FFF2-40B4-BE49-F238E27FC236}">
+                <a16:creationId xmlns:a16="http://schemas.microsoft.com/office/drawing/2014/main" id="{55830AD6-028B-4C4E-80BF-B70DFC1C3A46}"/>
+              </a:ext>
+            </a:extLst>
+          </p:cNvPr>
+          <p:cNvSpPr txBox="1"/>
+          <p:nvPr/>
+        </p:nvSpPr>
+        <p:spPr>
+          <a:xfrm>
+            <a:off x="567542" y="1216429"/>
+            <a:ext cx="8802410" cy="1569660"/>
+          </a:xfrm>
+          <a:prstGeom prst="rect">
+            <a:avLst/>
+          </a:prstGeom>
+          <a:noFill/>
+        </p:spPr>
+        <p:txBody>
+          <a:bodyPr wrap="none" rtlCol="0">
+            <a:spAutoFit/>
+          </a:bodyPr>
+          <a:lstStyle/>
+          <a:p>
+            <a:r>
+              <a:rPr lang="ja-JP" altLang="en-US" sz="2400" dirty="0"/>
+              <a:t>このゲームキャラクターのジャンプの最高到達点を求めなさい</a:t>
+            </a:r>
+            <a:endParaRPr lang="en-US" altLang="ja-JP" sz="2400" dirty="0"/>
+          </a:p>
+          <a:p>
+            <a:r>
+              <a:rPr lang="ja-JP" altLang="en-US" sz="2400" dirty="0"/>
+              <a:t>・質量：</a:t>
+            </a:r>
+            <a:r>
+              <a:rPr lang="en-US" altLang="ja-JP" sz="2400" dirty="0"/>
+              <a:t>2kg</a:t>
+            </a:r>
+          </a:p>
+          <a:p>
+            <a:r>
+              <a:rPr lang="ja-JP" altLang="en-US" sz="2400" dirty="0"/>
+              <a:t>・地面の高さ：</a:t>
+            </a:r>
+            <a:r>
+              <a:rPr lang="en-US" altLang="ja-JP" sz="2400" dirty="0"/>
+              <a:t>0</a:t>
+            </a:r>
+          </a:p>
+          <a:p>
+            <a:r>
+              <a:rPr lang="ja-JP" altLang="en-US" sz="2400" dirty="0"/>
+              <a:t>・ジャンプの初速：</a:t>
+            </a:r>
+            <a:r>
+              <a:rPr lang="en-US" altLang="ja-JP" sz="2400" dirty="0"/>
+              <a:t>5m/</a:t>
+            </a:r>
+            <a:r>
+              <a:rPr lang="ja-JP" altLang="en-US" sz="2400" dirty="0"/>
+              <a:t>秒</a:t>
+            </a:r>
+            <a:endParaRPr lang="en-US" altLang="ja-JP" sz="2400" dirty="0"/>
+          </a:p>
+        </p:txBody>
+      </p:sp>
+    </p:spTree>
+    <p:extLst>
+      <p:ext uri="{BB962C8B-B14F-4D97-AF65-F5344CB8AC3E}">
+        <p14:creationId xmlns:p14="http://schemas.microsoft.com/office/powerpoint/2010/main" val="1328921687"/>
+      </p:ext>
+    </p:extLst>
+  </p:cSld>
+  <p:clrMapOvr>
+    <a:masterClrMapping/>
+  </p:clrMapOvr>
+</p:sld>
+</file>
+
+<file path=ppt/slides/slide7.xml><?xml version="1.0" encoding="utf-8"?>
+<p:sld xmlns:a="http://schemas.openxmlformats.org/drawingml/2006/main" xmlns:r="http://schemas.openxmlformats.org/officeDocument/2006/relationships" xmlns:p="http://schemas.openxmlformats.org/presentationml/2006/main">
+  <p:cSld>
+    <p:spTree>
+      <p:nvGrpSpPr>
+        <p:cNvPr id="1" name=""/>
+        <p:cNvGrpSpPr/>
+        <p:nvPr/>
+      </p:nvGrpSpPr>
+      <p:grpSpPr>
+        <a:xfrm>
+          <a:off x="0" y="0"/>
+          <a:ext cx="0" cy="0"/>
+          <a:chOff x="0" y="0"/>
+          <a:chExt cx="0" cy="0"/>
+        </a:xfrm>
+      </p:grpSpPr>
+      <p:sp>
+        <p:nvSpPr>
+          <p:cNvPr id="3" name="四角形: 角を丸くする 2">
+            <a:extLst>
+              <a:ext uri="{FF2B5EF4-FFF2-40B4-BE49-F238E27FC236}">
+                <a16:creationId xmlns:a16="http://schemas.microsoft.com/office/drawing/2014/main" id="{72551BE9-C5D0-4560-A014-25AB9B57A254}"/>
+              </a:ext>
+            </a:extLst>
+          </p:cNvPr>
+          <p:cNvSpPr/>
+          <p:nvPr/>
+        </p:nvSpPr>
+        <p:spPr>
+          <a:xfrm>
+            <a:off x="304800" y="2047426"/>
+            <a:ext cx="5987386" cy="3594145"/>
+          </a:xfrm>
+          <a:prstGeom prst="roundRect">
+            <a:avLst/>
+          </a:prstGeom>
+          <a:solidFill>
+            <a:schemeClr val="bg1">
+              <a:lumMod val="85000"/>
+            </a:schemeClr>
+          </a:solidFill>
+          <a:ln>
+            <a:noFill/>
+          </a:ln>
+        </p:spPr>
+        <p:style>
+          <a:lnRef idx="2">
+            <a:schemeClr val="accent1">
+              <a:shade val="50000"/>
+            </a:schemeClr>
+          </a:lnRef>
+          <a:fillRef idx="1">
+            <a:schemeClr val="accent1"/>
+          </a:fillRef>
+          <a:effectRef idx="0">
+            <a:schemeClr val="accent1"/>
+          </a:effectRef>
+          <a:fontRef idx="minor">
+            <a:schemeClr val="lt1"/>
+          </a:fontRef>
+        </p:style>
+        <p:txBody>
+          <a:bodyPr rtlCol="0" anchor="ctr"/>
+          <a:lstStyle/>
+          <a:p>
+            <a:pPr algn="ctr"/>
+            <a:endParaRPr kumimoji="1" lang="ja-JP" altLang="en-US"/>
+          </a:p>
+        </p:txBody>
+      </p:sp>
+      <p:sp>
+        <p:nvSpPr>
+          <p:cNvPr id="4" name="テキスト ボックス 3">
+            <a:extLst>
+              <a:ext uri="{FF2B5EF4-FFF2-40B4-BE49-F238E27FC236}">
+                <a16:creationId xmlns:a16="http://schemas.microsoft.com/office/drawing/2014/main" id="{5A13BF46-B8C5-48AA-8308-C9ECFF431A18}"/>
+              </a:ext>
+            </a:extLst>
+          </p:cNvPr>
+          <p:cNvSpPr txBox="1"/>
+          <p:nvPr/>
+        </p:nvSpPr>
+        <p:spPr>
+          <a:xfrm>
+            <a:off x="567542" y="491954"/>
+            <a:ext cx="6867586" cy="584775"/>
+          </a:xfrm>
+          <a:prstGeom prst="rect">
+            <a:avLst/>
+          </a:prstGeom>
+          <a:noFill/>
+        </p:spPr>
+        <p:txBody>
+          <a:bodyPr wrap="none" rtlCol="0">
+            <a:spAutoFit/>
+          </a:bodyPr>
+          <a:lstStyle/>
+          <a:p>
+            <a:r>
+              <a:rPr kumimoji="1" lang="ja-JP" altLang="en-US" sz="3200" b="1" u="sng" dirty="0"/>
+              <a:t>力学的エネルギー保存の法則 おまけ</a:t>
+            </a:r>
+            <a:endParaRPr kumimoji="1" lang="en-US" altLang="ja-JP" sz="3200" b="1" u="sng" dirty="0"/>
+          </a:p>
+        </p:txBody>
+      </p:sp>
+      <p:sp>
+        <p:nvSpPr>
+          <p:cNvPr id="6" name="テキスト ボックス 5">
+            <a:extLst>
+              <a:ext uri="{FF2B5EF4-FFF2-40B4-BE49-F238E27FC236}">
+                <a16:creationId xmlns:a16="http://schemas.microsoft.com/office/drawing/2014/main" id="{55830AD6-028B-4C4E-80BF-B70DFC1C3A46}"/>
+              </a:ext>
+            </a:extLst>
+          </p:cNvPr>
+          <p:cNvSpPr txBox="1"/>
+          <p:nvPr/>
+        </p:nvSpPr>
+        <p:spPr>
+          <a:xfrm>
+            <a:off x="567542" y="1216429"/>
+            <a:ext cx="10649069" cy="830997"/>
+          </a:xfrm>
+          <a:prstGeom prst="rect">
+            <a:avLst/>
+          </a:prstGeom>
+          <a:noFill/>
+        </p:spPr>
+        <p:txBody>
+          <a:bodyPr wrap="none" rtlCol="0">
+            <a:spAutoFit/>
+          </a:bodyPr>
+          <a:lstStyle/>
+          <a:p>
+            <a:r>
+              <a:rPr lang="ja-JP" altLang="en-US" sz="2400" dirty="0"/>
+              <a:t>今回の定理には摩擦など、外部のエネルギーが考慮されていません。</a:t>
+            </a:r>
+            <a:endParaRPr lang="en-US" altLang="ja-JP" sz="2400" dirty="0"/>
+          </a:p>
+          <a:p>
+            <a:r>
+              <a:rPr lang="ja-JP" altLang="en-US" sz="2400" dirty="0"/>
+              <a:t>よりリアルな計算をする場合は、外部からのエネルギーも計算に入れます。</a:t>
+            </a:r>
+            <a:endParaRPr lang="en-US" altLang="ja-JP" sz="2400" dirty="0"/>
+          </a:p>
+        </p:txBody>
+      </p:sp>
+      <mc:AlternateContent xmlns:mc="http://schemas.openxmlformats.org/markup-compatibility/2006">
+        <mc:Choice xmlns:a14="http://schemas.microsoft.com/office/drawing/2010/main" Requires="a14">
+          <p:sp>
+            <p:nvSpPr>
+              <p:cNvPr id="7" name="テキスト ボックス 6">
+                <a:extLst>
+                  <a:ext uri="{FF2B5EF4-FFF2-40B4-BE49-F238E27FC236}">
+                    <a16:creationId xmlns:a16="http://schemas.microsoft.com/office/drawing/2014/main" id="{697EF06C-33BD-435B-888D-09E9ACC62874}"/>
+                  </a:ext>
+                </a:extLst>
+              </p:cNvPr>
+              <p:cNvSpPr txBox="1"/>
+              <p:nvPr/>
+            </p:nvSpPr>
+            <p:spPr>
+              <a:xfrm>
+                <a:off x="567542" y="2187126"/>
+                <a:ext cx="5724644" cy="3228833"/>
+              </a:xfrm>
+              <a:prstGeom prst="rect">
+                <a:avLst/>
+              </a:prstGeom>
+              <a:noFill/>
+            </p:spPr>
+            <p:txBody>
+              <a:bodyPr wrap="none" rtlCol="0">
+                <a:spAutoFit/>
+              </a:bodyPr>
+              <a:lstStyle/>
+              <a:p>
+                <a:r>
+                  <a:rPr lang="ja-JP" altLang="en-US" sz="2400" b="1" dirty="0">
+                    <a:solidFill>
+                      <a:srgbClr val="FF0000"/>
+                    </a:solidFill>
+                  </a:rPr>
+                  <a:t>■力学的エネルギー保存の法則</a:t>
+                </a:r>
+                <a:endParaRPr lang="en-US" altLang="ja-JP" sz="2400" b="1" dirty="0">
+                  <a:solidFill>
+                    <a:srgbClr val="FF0000"/>
+                  </a:solidFill>
+                </a:endParaRPr>
+              </a:p>
+              <a:p>
+                <a14:m>
+                  <m:oMath xmlns:m="http://schemas.openxmlformats.org/officeDocument/2006/math">
+                    <m:sSub>
+                      <m:sSubPr>
+                        <m:ctrlPr>
+                          <a:rPr lang="en-US" altLang="ja-JP" sz="2400" i="1" smtClean="0">
+                            <a:latin typeface="Cambria Math" panose="02040503050406030204" pitchFamily="18" charset="0"/>
+                          </a:rPr>
+                        </m:ctrlPr>
+                      </m:sSubPr>
+                      <m:e>
+                        <m:r>
+                          <a:rPr lang="en-US" altLang="ja-JP" sz="2400" b="0" i="1" smtClean="0">
+                            <a:latin typeface="Cambria Math" panose="02040503050406030204" pitchFamily="18" charset="0"/>
+                          </a:rPr>
+                          <m:t>𝐾𝐸</m:t>
+                        </m:r>
+                      </m:e>
+                      <m:sub>
+                        <m:r>
+                          <a:rPr lang="en-US" altLang="ja-JP" sz="2400" b="0" i="1" smtClean="0">
+                            <a:latin typeface="Cambria Math" panose="02040503050406030204" pitchFamily="18" charset="0"/>
+                          </a:rPr>
+                          <m:t>𝑖</m:t>
+                        </m:r>
+                      </m:sub>
+                    </m:sSub>
+                    <m:r>
+                      <a:rPr lang="en-US" altLang="ja-JP" sz="2400" b="0" i="1" smtClean="0">
+                        <a:latin typeface="Cambria Math" panose="02040503050406030204" pitchFamily="18" charset="0"/>
+                      </a:rPr>
+                      <m:t>+</m:t>
+                    </m:r>
+                    <m:sSub>
+                      <m:sSubPr>
+                        <m:ctrlPr>
+                          <a:rPr lang="en-US" altLang="ja-JP" sz="2400" i="1">
+                            <a:latin typeface="Cambria Math" panose="02040503050406030204" pitchFamily="18" charset="0"/>
+                          </a:rPr>
+                        </m:ctrlPr>
+                      </m:sSubPr>
+                      <m:e>
+                        <m:r>
+                          <a:rPr lang="en-US" altLang="ja-JP" sz="2400" b="0" i="1" smtClean="0">
+                            <a:latin typeface="Cambria Math" panose="02040503050406030204" pitchFamily="18" charset="0"/>
+                          </a:rPr>
+                          <m:t>𝑃</m:t>
+                        </m:r>
+                        <m:r>
+                          <a:rPr lang="en-US" altLang="ja-JP" sz="2400" i="1">
+                            <a:latin typeface="Cambria Math" panose="02040503050406030204" pitchFamily="18" charset="0"/>
+                          </a:rPr>
+                          <m:t>𝐸</m:t>
+                        </m:r>
+                      </m:e>
+                      <m:sub>
+                        <m:r>
+                          <a:rPr lang="en-US" altLang="ja-JP" sz="2400" i="1">
+                            <a:latin typeface="Cambria Math" panose="02040503050406030204" pitchFamily="18" charset="0"/>
+                          </a:rPr>
+                          <m:t>𝑖</m:t>
+                        </m:r>
+                      </m:sub>
+                    </m:sSub>
+                    <m:r>
+                      <a:rPr lang="en-US" altLang="ja-JP" sz="2400" b="0" i="1" smtClean="0">
+                        <a:latin typeface="Cambria Math" panose="02040503050406030204" pitchFamily="18" charset="0"/>
+                      </a:rPr>
+                      <m:t>=</m:t>
+                    </m:r>
+                    <m:sSub>
+                      <m:sSubPr>
+                        <m:ctrlPr>
+                          <a:rPr lang="en-US" altLang="ja-JP" sz="2400" i="1" smtClean="0">
+                            <a:latin typeface="Cambria Math" panose="02040503050406030204" pitchFamily="18" charset="0"/>
+                          </a:rPr>
+                        </m:ctrlPr>
+                      </m:sSubPr>
+                      <m:e>
+                        <m:r>
+                          <a:rPr lang="en-US" altLang="ja-JP" sz="2400" i="1">
+                            <a:latin typeface="Cambria Math" panose="02040503050406030204" pitchFamily="18" charset="0"/>
+                          </a:rPr>
+                          <m:t>𝐾𝐸</m:t>
+                        </m:r>
+                      </m:e>
+                      <m:sub>
+                        <m:r>
+                          <a:rPr lang="en-US" altLang="ja-JP" sz="2400" b="0" i="1" smtClean="0">
+                            <a:latin typeface="Cambria Math" panose="02040503050406030204" pitchFamily="18" charset="0"/>
+                          </a:rPr>
+                          <m:t>𝑓</m:t>
+                        </m:r>
+                      </m:sub>
+                    </m:sSub>
+                    <m:r>
+                      <a:rPr lang="en-US" altLang="ja-JP" sz="2400" b="0" i="1" smtClean="0">
+                        <a:latin typeface="Cambria Math" panose="02040503050406030204" pitchFamily="18" charset="0"/>
+                      </a:rPr>
+                      <m:t>+</m:t>
+                    </m:r>
+                    <m:sSub>
+                      <m:sSubPr>
+                        <m:ctrlPr>
+                          <a:rPr lang="en-US" altLang="ja-JP" sz="2400" i="1">
+                            <a:latin typeface="Cambria Math" panose="02040503050406030204" pitchFamily="18" charset="0"/>
+                          </a:rPr>
+                        </m:ctrlPr>
+                      </m:sSubPr>
+                      <m:e>
+                        <m:r>
+                          <a:rPr lang="en-US" altLang="ja-JP" sz="2400" b="0" i="1" smtClean="0">
+                            <a:latin typeface="Cambria Math" panose="02040503050406030204" pitchFamily="18" charset="0"/>
+                          </a:rPr>
+                          <m:t>𝑃</m:t>
+                        </m:r>
+                        <m:r>
+                          <a:rPr lang="en-US" altLang="ja-JP" sz="2400" i="1">
+                            <a:latin typeface="Cambria Math" panose="02040503050406030204" pitchFamily="18" charset="0"/>
+                          </a:rPr>
+                          <m:t>𝐸</m:t>
+                        </m:r>
+                      </m:e>
+                      <m:sub>
+                        <m:r>
+                          <a:rPr lang="en-US" altLang="ja-JP" sz="2400" b="0" i="1" smtClean="0">
+                            <a:latin typeface="Cambria Math" panose="02040503050406030204" pitchFamily="18" charset="0"/>
+                          </a:rPr>
+                          <m:t>𝑓</m:t>
+                        </m:r>
+                      </m:sub>
+                    </m:sSub>
+                    <m:r>
+                      <a:rPr lang="en-US" altLang="ja-JP" sz="2400" b="0" i="1" smtClean="0">
+                        <a:latin typeface="Cambria Math" panose="02040503050406030204" pitchFamily="18" charset="0"/>
+                      </a:rPr>
+                      <m:t>+</m:t>
+                    </m:r>
+                    <m:sSub>
+                      <m:sSubPr>
+                        <m:ctrlPr>
+                          <a:rPr lang="en-US" altLang="ja-JP" sz="2400" b="0" i="1" smtClean="0">
+                            <a:latin typeface="Cambria Math" panose="02040503050406030204" pitchFamily="18" charset="0"/>
+                          </a:rPr>
+                        </m:ctrlPr>
+                      </m:sSubPr>
+                      <m:e>
+                        <m:r>
+                          <a:rPr lang="en-US" altLang="ja-JP" sz="2400" b="0" i="1" smtClean="0">
+                            <a:latin typeface="Cambria Math" panose="02040503050406030204" pitchFamily="18" charset="0"/>
+                          </a:rPr>
+                          <m:t>𝐸</m:t>
+                        </m:r>
+                      </m:e>
+                      <m:sub>
+                        <m:r>
+                          <a:rPr lang="en-US" altLang="ja-JP" sz="2400" b="0" i="1" smtClean="0">
+                            <a:latin typeface="Cambria Math" panose="02040503050406030204" pitchFamily="18" charset="0"/>
+                          </a:rPr>
+                          <m:t>𝑜</m:t>
+                        </m:r>
+                      </m:sub>
+                    </m:sSub>
+                  </m:oMath>
+                </a14:m>
+                <a:r>
+                  <a:rPr lang="en-US" altLang="ja-JP" sz="2400" dirty="0"/>
+                  <a:t> </a:t>
+                </a:r>
+              </a:p>
+              <a:p>
+                <a:r>
+                  <a:rPr lang="ja-JP" altLang="en-US" sz="2400" dirty="0"/>
+                  <a:t>あるいは</a:t>
+                </a:r>
+                <a:endParaRPr lang="en-US" altLang="ja-JP" sz="2400" dirty="0"/>
+              </a:p>
+              <a:p>
+                <a14:m>
+                  <m:oMath xmlns:m="http://schemas.openxmlformats.org/officeDocument/2006/math">
+                    <m:f>
+                      <m:fPr>
+                        <m:ctrlPr>
+                          <a:rPr lang="en-US" altLang="ja-JP" sz="2400" i="1" dirty="0">
+                            <a:latin typeface="Cambria Math" panose="02040503050406030204" pitchFamily="18" charset="0"/>
+                          </a:rPr>
+                        </m:ctrlPr>
+                      </m:fPr>
+                      <m:num>
+                        <m:r>
+                          <a:rPr lang="en-US" altLang="ja-JP" sz="2400" i="1" dirty="0">
+                            <a:latin typeface="Cambria Math" panose="02040503050406030204" pitchFamily="18" charset="0"/>
+                          </a:rPr>
+                          <m:t>1</m:t>
+                        </m:r>
+                      </m:num>
+                      <m:den>
+                        <m:r>
+                          <a:rPr lang="en-US" altLang="ja-JP" sz="2400" i="1" dirty="0">
+                            <a:latin typeface="Cambria Math" panose="02040503050406030204" pitchFamily="18" charset="0"/>
+                          </a:rPr>
+                          <m:t>2</m:t>
+                        </m:r>
+                      </m:den>
+                    </m:f>
+                    <m:sSup>
+                      <m:sSupPr>
+                        <m:ctrlPr>
+                          <a:rPr lang="en-US" altLang="ja-JP" sz="2400" i="1" dirty="0" smtClean="0">
+                            <a:latin typeface="Cambria Math" panose="02040503050406030204" pitchFamily="18" charset="0"/>
+                          </a:rPr>
+                        </m:ctrlPr>
+                      </m:sSupPr>
+                      <m:e>
+                        <m:sSub>
+                          <m:sSubPr>
+                            <m:ctrlPr>
+                              <a:rPr lang="en-US" altLang="ja-JP" sz="2400" i="1" dirty="0" smtClean="0">
+                                <a:latin typeface="Cambria Math" panose="02040503050406030204" pitchFamily="18" charset="0"/>
+                              </a:rPr>
+                            </m:ctrlPr>
+                          </m:sSubPr>
+                          <m:e>
+                            <m:r>
+                              <a:rPr lang="en-US" altLang="ja-JP" sz="2400" b="0" i="1" dirty="0" smtClean="0">
+                                <a:latin typeface="Cambria Math" panose="02040503050406030204" pitchFamily="18" charset="0"/>
+                              </a:rPr>
+                              <m:t>𝑚𝑣</m:t>
+                            </m:r>
+                          </m:e>
+                          <m:sub>
+                            <m:r>
+                              <a:rPr lang="en-US" altLang="ja-JP" sz="2400" b="0" i="1" dirty="0" smtClean="0">
+                                <a:latin typeface="Cambria Math" panose="02040503050406030204" pitchFamily="18" charset="0"/>
+                              </a:rPr>
+                              <m:t>𝑖</m:t>
+                            </m:r>
+                          </m:sub>
+                        </m:sSub>
+                      </m:e>
+                      <m:sup>
+                        <m:r>
+                          <a:rPr lang="en-US" altLang="ja-JP" sz="2400" b="0" i="1" dirty="0" smtClean="0">
+                            <a:latin typeface="Cambria Math" panose="02040503050406030204" pitchFamily="18" charset="0"/>
+                          </a:rPr>
+                          <m:t>2</m:t>
+                        </m:r>
+                      </m:sup>
+                    </m:sSup>
+                    <m:r>
+                      <a:rPr lang="en-US" altLang="ja-JP" sz="2400" b="0" i="1" dirty="0" smtClean="0">
+                        <a:latin typeface="Cambria Math" panose="02040503050406030204" pitchFamily="18" charset="0"/>
+                      </a:rPr>
+                      <m:t>+</m:t>
+                    </m:r>
+                    <m:sSub>
+                      <m:sSubPr>
+                        <m:ctrlPr>
+                          <a:rPr lang="en-US" altLang="ja-JP" sz="2400" b="0" i="1" dirty="0" smtClean="0">
+                            <a:latin typeface="Cambria Math" panose="02040503050406030204" pitchFamily="18" charset="0"/>
+                          </a:rPr>
+                        </m:ctrlPr>
+                      </m:sSubPr>
+                      <m:e>
+                        <m:r>
+                          <a:rPr lang="en-US" altLang="ja-JP" sz="2400" b="0" i="1" dirty="0" smtClean="0">
+                            <a:latin typeface="Cambria Math" panose="02040503050406030204" pitchFamily="18" charset="0"/>
+                          </a:rPr>
+                          <m:t>𝑚𝑔𝑦</m:t>
+                        </m:r>
+                      </m:e>
+                      <m:sub>
+                        <m:r>
+                          <a:rPr lang="en-US" altLang="ja-JP" sz="2400" b="0" i="1" dirty="0" smtClean="0">
+                            <a:latin typeface="Cambria Math" panose="02040503050406030204" pitchFamily="18" charset="0"/>
+                          </a:rPr>
+                          <m:t>𝑖</m:t>
+                        </m:r>
+                      </m:sub>
+                    </m:sSub>
+                    <m:r>
+                      <a:rPr lang="en-US" altLang="ja-JP" sz="2400" b="0" i="1" dirty="0" smtClean="0">
+                        <a:latin typeface="Cambria Math" panose="02040503050406030204" pitchFamily="18" charset="0"/>
+                      </a:rPr>
+                      <m:t>=</m:t>
+                    </m:r>
+                    <m:f>
+                      <m:fPr>
+                        <m:ctrlPr>
+                          <a:rPr lang="en-US" altLang="ja-JP" sz="2400" i="1" dirty="0">
+                            <a:latin typeface="Cambria Math" panose="02040503050406030204" pitchFamily="18" charset="0"/>
+                          </a:rPr>
+                        </m:ctrlPr>
+                      </m:fPr>
+                      <m:num>
+                        <m:r>
+                          <a:rPr lang="en-US" altLang="ja-JP" sz="2400" i="1" dirty="0">
+                            <a:latin typeface="Cambria Math" panose="02040503050406030204" pitchFamily="18" charset="0"/>
+                          </a:rPr>
+                          <m:t>1</m:t>
+                        </m:r>
+                      </m:num>
+                      <m:den>
+                        <m:r>
+                          <a:rPr lang="en-US" altLang="ja-JP" sz="2400" i="1" dirty="0">
+                            <a:latin typeface="Cambria Math" panose="02040503050406030204" pitchFamily="18" charset="0"/>
+                          </a:rPr>
+                          <m:t>2</m:t>
+                        </m:r>
+                      </m:den>
+                    </m:f>
+                    <m:sSup>
+                      <m:sSupPr>
+                        <m:ctrlPr>
+                          <a:rPr lang="en-US" altLang="ja-JP" sz="2400" i="1" dirty="0">
+                            <a:latin typeface="Cambria Math" panose="02040503050406030204" pitchFamily="18" charset="0"/>
+                          </a:rPr>
+                        </m:ctrlPr>
+                      </m:sSupPr>
+                      <m:e>
+                        <m:sSub>
+                          <m:sSubPr>
+                            <m:ctrlPr>
+                              <a:rPr lang="en-US" altLang="ja-JP" sz="2400" i="1" dirty="0">
+                                <a:latin typeface="Cambria Math" panose="02040503050406030204" pitchFamily="18" charset="0"/>
+                              </a:rPr>
+                            </m:ctrlPr>
+                          </m:sSubPr>
+                          <m:e>
+                            <m:r>
+                              <a:rPr lang="en-US" altLang="ja-JP" sz="2400" i="1" dirty="0">
+                                <a:latin typeface="Cambria Math" panose="02040503050406030204" pitchFamily="18" charset="0"/>
+                              </a:rPr>
+                              <m:t>𝑚𝑣</m:t>
+                            </m:r>
+                          </m:e>
+                          <m:sub>
+                            <m:r>
+                              <a:rPr lang="en-US" altLang="ja-JP" sz="2400" b="0" i="1" dirty="0" smtClean="0">
+                                <a:latin typeface="Cambria Math" panose="02040503050406030204" pitchFamily="18" charset="0"/>
+                              </a:rPr>
+                              <m:t>𝑓</m:t>
+                            </m:r>
+                          </m:sub>
+                        </m:sSub>
+                      </m:e>
+                      <m:sup>
+                        <m:r>
+                          <a:rPr lang="en-US" altLang="ja-JP" sz="2400" i="1" dirty="0">
+                            <a:latin typeface="Cambria Math" panose="02040503050406030204" pitchFamily="18" charset="0"/>
+                          </a:rPr>
+                          <m:t>2</m:t>
+                        </m:r>
+                      </m:sup>
+                    </m:sSup>
+                    <m:r>
+                      <a:rPr lang="en-US" altLang="ja-JP" sz="2400" i="1" dirty="0">
+                        <a:latin typeface="Cambria Math" panose="02040503050406030204" pitchFamily="18" charset="0"/>
+                      </a:rPr>
+                      <m:t>+</m:t>
+                    </m:r>
+                    <m:sSub>
+                      <m:sSubPr>
+                        <m:ctrlPr>
+                          <a:rPr lang="en-US" altLang="ja-JP" sz="2400" i="1" dirty="0">
+                            <a:latin typeface="Cambria Math" panose="02040503050406030204" pitchFamily="18" charset="0"/>
+                          </a:rPr>
+                        </m:ctrlPr>
+                      </m:sSubPr>
+                      <m:e>
+                        <m:r>
+                          <a:rPr lang="en-US" altLang="ja-JP" sz="2400" i="1" dirty="0">
+                            <a:latin typeface="Cambria Math" panose="02040503050406030204" pitchFamily="18" charset="0"/>
+                          </a:rPr>
+                          <m:t>𝑚𝑔𝑦</m:t>
+                        </m:r>
+                      </m:e>
+                      <m:sub>
+                        <m:r>
+                          <a:rPr lang="en-US" altLang="ja-JP" sz="2400" b="0" i="1" dirty="0" smtClean="0">
+                            <a:latin typeface="Cambria Math" panose="02040503050406030204" pitchFamily="18" charset="0"/>
+                          </a:rPr>
+                          <m:t>𝑓</m:t>
+                        </m:r>
+                      </m:sub>
+                    </m:sSub>
+                    <m:r>
+                      <a:rPr lang="en-US" altLang="ja-JP" sz="2400" i="1">
+                        <a:latin typeface="Cambria Math" panose="02040503050406030204" pitchFamily="18" charset="0"/>
+                      </a:rPr>
+                      <m:t>+</m:t>
+                    </m:r>
+                    <m:sSub>
+                      <m:sSubPr>
+                        <m:ctrlPr>
+                          <a:rPr lang="en-US" altLang="ja-JP" sz="2400" i="1">
+                            <a:latin typeface="Cambria Math" panose="02040503050406030204" pitchFamily="18" charset="0"/>
+                          </a:rPr>
+                        </m:ctrlPr>
+                      </m:sSubPr>
+                      <m:e>
+                        <m:r>
+                          <a:rPr lang="en-US" altLang="ja-JP" sz="2400" i="1">
+                            <a:latin typeface="Cambria Math" panose="02040503050406030204" pitchFamily="18" charset="0"/>
+                          </a:rPr>
+                          <m:t>𝐸</m:t>
+                        </m:r>
+                      </m:e>
+                      <m:sub>
+                        <m:r>
+                          <a:rPr lang="en-US" altLang="ja-JP" sz="2400" i="1">
+                            <a:latin typeface="Cambria Math" panose="02040503050406030204" pitchFamily="18" charset="0"/>
+                          </a:rPr>
+                          <m:t>𝑜</m:t>
+                        </m:r>
+                      </m:sub>
+                    </m:sSub>
+                  </m:oMath>
+                </a14:m>
+                <a:r>
+                  <a:rPr lang="en-US" altLang="ja-JP" sz="2400" dirty="0"/>
+                  <a:t> </a:t>
+                </a:r>
+              </a:p>
+              <a:p>
+                <a:endParaRPr lang="en-US" altLang="ja-JP" sz="2400" dirty="0"/>
+              </a:p>
+              <a:p>
+                <a14:m>
+                  <m:oMath xmlns:m="http://schemas.openxmlformats.org/officeDocument/2006/math">
+                    <m:r>
+                      <a:rPr lang="en-US" altLang="ja-JP" sz="2400" b="0" i="1" dirty="0" smtClean="0">
+                        <a:latin typeface="Cambria Math" panose="02040503050406030204" pitchFamily="18" charset="0"/>
+                      </a:rPr>
+                      <m:t>𝐾𝐸</m:t>
+                    </m:r>
+                  </m:oMath>
+                </a14:m>
+                <a:r>
+                  <a:rPr lang="en-US" altLang="ja-JP" sz="2400" dirty="0"/>
+                  <a:t>	</a:t>
+                </a:r>
+                <a:r>
+                  <a:rPr lang="ja-JP" altLang="en-US" sz="2400" dirty="0"/>
+                  <a:t>・・・運動エネルギー</a:t>
+                </a:r>
+                <a:endParaRPr lang="en-US" altLang="ja-JP" sz="2400" dirty="0"/>
+              </a:p>
+              <a:p>
+                <a14:m>
+                  <m:oMath xmlns:m="http://schemas.openxmlformats.org/officeDocument/2006/math">
+                    <m:r>
+                      <a:rPr lang="en-US" altLang="ja-JP" sz="2400" b="0" i="1" dirty="0" smtClean="0">
+                        <a:latin typeface="Cambria Math" panose="02040503050406030204" pitchFamily="18" charset="0"/>
+                      </a:rPr>
+                      <m:t>𝑃𝐸</m:t>
+                    </m:r>
+                  </m:oMath>
+                </a14:m>
+                <a:r>
+                  <a:rPr lang="en-US" altLang="ja-JP" sz="2400" dirty="0"/>
+                  <a:t>	</a:t>
+                </a:r>
+                <a:r>
+                  <a:rPr lang="ja-JP" altLang="en-US" sz="2400" dirty="0"/>
+                  <a:t>・・・位置エネルギー</a:t>
+                </a:r>
+                <a:endParaRPr lang="en-US" altLang="ja-JP" sz="2400" dirty="0"/>
+              </a:p>
+              <a:p>
+                <a14:m>
+                  <m:oMath xmlns:m="http://schemas.openxmlformats.org/officeDocument/2006/math">
+                    <m:sSub>
+                      <m:sSubPr>
+                        <m:ctrlPr>
+                          <a:rPr lang="en-US" altLang="ja-JP" sz="2400" i="1" smtClean="0">
+                            <a:latin typeface="Cambria Math" panose="02040503050406030204" pitchFamily="18" charset="0"/>
+                          </a:rPr>
+                        </m:ctrlPr>
+                      </m:sSubPr>
+                      <m:e>
+                        <m:r>
+                          <a:rPr lang="en-US" altLang="ja-JP" sz="2400" i="1">
+                            <a:latin typeface="Cambria Math" panose="02040503050406030204" pitchFamily="18" charset="0"/>
+                          </a:rPr>
+                          <m:t>𝐸</m:t>
+                        </m:r>
+                      </m:e>
+                      <m:sub>
+                        <m:r>
+                          <a:rPr lang="en-US" altLang="ja-JP" sz="2400" i="1">
+                            <a:latin typeface="Cambria Math" panose="02040503050406030204" pitchFamily="18" charset="0"/>
+                          </a:rPr>
+                          <m:t>𝑜</m:t>
+                        </m:r>
+                      </m:sub>
+                    </m:sSub>
+                  </m:oMath>
+                </a14:m>
+                <a:r>
+                  <a:rPr lang="en-US" altLang="ja-JP" sz="2400" dirty="0"/>
+                  <a:t>	</a:t>
+                </a:r>
+                <a:r>
+                  <a:rPr lang="ja-JP" altLang="en-US" sz="2400" dirty="0"/>
+                  <a:t>・・・外部から受けるエネルギー</a:t>
+                </a:r>
+                <a:endParaRPr lang="en-US" altLang="ja-JP" sz="2400" dirty="0"/>
+              </a:p>
+            </p:txBody>
+          </p:sp>
+        </mc:Choice>
+        <mc:Fallback>
+          <p:sp>
+            <p:nvSpPr>
+              <p:cNvPr id="7" name="テキスト ボックス 6">
+                <a:extLst>
+                  <a:ext uri="{FF2B5EF4-FFF2-40B4-BE49-F238E27FC236}">
+                    <a16:creationId xmlns:a16="http://schemas.microsoft.com/office/drawing/2014/main" id="{697EF06C-33BD-435B-888D-09E9ACC62874}"/>
+                  </a:ext>
+                </a:extLst>
+              </p:cNvPr>
+              <p:cNvSpPr txBox="1">
+                <a:spLocks noRot="1" noChangeAspect="1" noMove="1" noResize="1" noEditPoints="1" noAdjustHandles="1" noChangeArrowheads="1" noChangeShapeType="1" noTextEdit="1"/>
+              </p:cNvSpPr>
+              <p:nvPr/>
+            </p:nvSpPr>
+            <p:spPr>
+              <a:xfrm>
+                <a:off x="567542" y="2187126"/>
+                <a:ext cx="5724644" cy="3228833"/>
+              </a:xfrm>
+              <a:prstGeom prst="rect">
+                <a:avLst/>
+              </a:prstGeom>
+              <a:blipFill>
+                <a:blip r:embed="rId2"/>
+                <a:stretch>
+                  <a:fillRect l="-1597" t="-1512" r="-745" b="-3592"/>
+                </a:stretch>
+              </a:blipFill>
+            </p:spPr>
+            <p:txBody>
+              <a:bodyPr/>
+              <a:lstStyle/>
+              <a:p>
+                <a:r>
+                  <a:rPr lang="ja-JP" altLang="en-US">
+                    <a:noFill/>
+                  </a:rPr>
+                  <a:t> </a:t>
+                </a:r>
+              </a:p>
+            </p:txBody>
+          </p:sp>
+        </mc:Fallback>
+      </mc:AlternateContent>
+    </p:spTree>
+    <p:extLst>
+      <p:ext uri="{BB962C8B-B14F-4D97-AF65-F5344CB8AC3E}">
+        <p14:creationId xmlns:p14="http://schemas.microsoft.com/office/powerpoint/2010/main" val="958208575"/>
       </p:ext>
     </p:extLst>
   </p:cSld>
